--- a/Slides/Semana 7/semana_7_slides.pptx
+++ b/Slides/Semana 7/semana_7_slides.pptx
@@ -1331,7 +1331,7 @@
 - "Se uma pessoa com deficiência quisesse participar amanhã, ela conseguiria?"
 - "Como vamos saber, depois da Execução, se este projeto deu certo?"
 Avaliação nesta semana: encerramento do ciclo de observação do critério Planejamento (15% do peso total), segundo a Rubrica de Avaliação — objetivos claros, público-alvo definido, cronograma realista, responsabilidades nominais, riscos, acessibilidade e segurança explícitos. Observa-se também Gestão do Projeto (consolidação objetiva dos checkpoints anteriores) e Trabalho em Equipe (participação de todos na consolidação do plano).
-Fonte: Plano Semanal Semana 7, Cronograma, CLAUDE.md, COURSE_CONTEXT.md, PEDAGOGICAL_RULES.md, EXTENSION_PROJECT_GUIDE.md.</a:t>
+Fonte: Plano Semanal Semana 7, Cronograma.</a:t>
             </a:r>
             <a:endParaRPr lang="en-US" dirty="0"/>
           </a:p>
